--- a/docs/assets/downloads/content-understanding-document-workflow.pptx
+++ b/docs/assets/downloads/content-understanding-document-workflow.pptx
@@ -2924,7 +2924,7 @@
       </p:grpSpPr>
       <p:pic>
         <p:nvPicPr>
-          <p:cNvPr id="2" name="Image 0" descr="/home/marco/fy27-hackathons/frontier-ai-starter-kit-rvas/docs/assets/img/logo-mark-white-slide.png">    </p:cNvPr>
+          <p:cNvPr id="2" name="Image 0" descr="/Users/marco/Desktop/repo/frontier-agentic-cobuild-rvas/docs/assets/img/logo-mark-white-slide.png">    </p:cNvPr>
           <p:cNvPicPr>
             <a:picLocks noChangeAspect="1"/>
           </p:cNvPicPr>
@@ -3137,7 +3137,7 @@
                 <a:ea typeface="Inter" pitchFamily="34" charset="-122"/>
                 <a:cs typeface="Inter" pitchFamily="34" charset="-120"/>
               </a:rPr>
-              <a:t>Turn document understanding into a governed business workflow.</a:t>
+              <a:t>Extract typed results from documents, review them against the source, and control the downstream action.</a:t>
             </a:r>
             <a:endParaRPr lang="en-US" sz="1700" dirty="0"/>
           </a:p>
@@ -3239,7 +3239,7 @@
       </p:sp>
       <p:pic>
         <p:nvPicPr>
-          <p:cNvPr id="3" name="Image 0" descr="/home/marco/fy27-hackathons/frontier-ai-starter-kit-rvas/docs/assets/img/logo-mark-slide.png">    </p:cNvPr>
+          <p:cNvPr id="3" name="Image 0" descr="/Users/marco/Desktop/repo/frontier-agentic-cobuild-rvas/docs/assets/img/logo-mark-slide.png">    </p:cNvPr>
           <p:cNvPicPr>
             <a:picLocks noChangeAspect="1"/>
           </p:cNvPicPr>
@@ -3542,7 +3542,7 @@
                 <a:ea typeface="Inter" pitchFamily="34" charset="-122"/>
                 <a:cs typeface="Inter" pitchFamily="34" charset="-120"/>
               </a:rPr>
-              <a:t>More flexible extraction increases validation, review, cost, and monitoring work.</a:t>
+              <a:t>Include validation, review, cost, and monitoring work in the capability decision.</a:t>
             </a:r>
             <a:endParaRPr lang="en-US" sz="1700" dirty="0"/>
           </a:p>
@@ -3609,7 +3609,7 @@
       </p:sp>
       <p:pic>
         <p:nvPicPr>
-          <p:cNvPr id="3" name="Image 0" descr="/home/marco/fy27-hackathons/frontier-ai-starter-kit-rvas/docs/assets/img/logo-mark-slide.png">    </p:cNvPr>
+          <p:cNvPr id="3" name="Image 0" descr="/Users/marco/Desktop/repo/frontier-agentic-cobuild-rvas/docs/assets/img/logo-mark-slide.png">    </p:cNvPr>
           <p:cNvPicPr>
             <a:picLocks noChangeAspect="1"/>
           </p:cNvPicPr>
@@ -3997,7 +3997,7 @@
       </p:sp>
       <p:pic>
         <p:nvPicPr>
-          <p:cNvPr id="3" name="Image 0" descr="/home/marco/fy27-hackathons/frontier-ai-starter-kit-rvas/docs/assets/img/logo-mark-slide.png">    </p:cNvPr>
+          <p:cNvPr id="3" name="Image 0" descr="/Users/marco/Desktop/repo/frontier-agentic-cobuild-rvas/docs/assets/img/logo-mark-slide.png">    </p:cNvPr>
           <p:cNvPicPr>
             <a:picLocks noChangeAspect="1"/>
           </p:cNvPicPr>
@@ -4134,7 +4134,7 @@
                 <a:ea typeface="Outfit" pitchFamily="34" charset="-122"/>
                 <a:cs typeface="Outfit" pitchFamily="34" charset="-120"/>
               </a:rPr>
-              <a:t>Module 4: Implement typed extraction with evidence</a:t>
+              <a:t>Module 4. Implement typed extraction with evidence</a:t>
             </a:r>
             <a:endParaRPr lang="en-US" sz="2900" dirty="0"/>
           </a:p>
@@ -4335,7 +4335,7 @@
                 <a:ea typeface="Inter" pitchFamily="34" charset="-122"/>
                 <a:cs typeface="Inter" pitchFamily="34" charset="-120"/>
               </a:rPr>
-              <a:t>Build more than a JSON shape. Build a decision record a reviewer and auditor can trust.</a:t>
+              <a:t>Keep the source evidence and review reasons with the typed result.</a:t>
             </a:r>
             <a:endParaRPr lang="en-US" sz="1700" dirty="0"/>
           </a:p>
@@ -4402,7 +4402,7 @@
       </p:sp>
       <p:pic>
         <p:nvPicPr>
-          <p:cNvPr id="3" name="Image 0" descr="/home/marco/fy27-hackathons/frontier-ai-starter-kit-rvas/docs/assets/img/logo-mark-slide.png">    </p:cNvPr>
+          <p:cNvPr id="3" name="Image 0" descr="/Users/marco/Desktop/repo/frontier-agentic-cobuild-rvas/docs/assets/img/logo-mark-slide.png">    </p:cNvPr>
           <p:cNvPicPr>
             <a:picLocks noChangeAspect="1"/>
           </p:cNvPicPr>
@@ -4705,7 +4705,7 @@
                 <a:ea typeface="Inter" pitchFamily="34" charset="-122"/>
                 <a:cs typeface="Inter" pitchFamily="34" charset="-120"/>
               </a:rPr>
-              <a:t>Automation depends on handling uncertainty well, not only on high field coverage.</a:t>
+              <a:t>Test missing and uncertain fields as well as correctly extracted values.</a:t>
             </a:r>
             <a:endParaRPr lang="en-US" sz="1700" dirty="0"/>
           </a:p>
@@ -4772,7 +4772,7 @@
       </p:sp>
       <p:pic>
         <p:nvPicPr>
-          <p:cNvPr id="3" name="Image 0" descr="/home/marco/fy27-hackathons/frontier-ai-starter-kit-rvas/docs/assets/img/logo-mark-slide.png">    </p:cNvPr>
+          <p:cNvPr id="3" name="Image 0" descr="/Users/marco/Desktop/repo/frontier-agentic-cobuild-rvas/docs/assets/img/logo-mark-slide.png">    </p:cNvPr>
           <p:cNvPicPr>
             <a:picLocks noChangeAspect="1"/>
           </p:cNvPicPr>
@@ -5160,7 +5160,7 @@
       </p:sp>
       <p:pic>
         <p:nvPicPr>
-          <p:cNvPr id="3" name="Image 0" descr="/home/marco/fy27-hackathons/frontier-ai-starter-kit-rvas/docs/assets/img/logo-mark-slide.png">    </p:cNvPr>
+          <p:cNvPr id="3" name="Image 0" descr="/Users/marco/Desktop/repo/frontier-agentic-cobuild-rvas/docs/assets/img/logo-mark-slide.png">    </p:cNvPr>
           <p:cNvPicPr>
             <a:picLocks noChangeAspect="1"/>
           </p:cNvPicPr>
@@ -5297,7 +5297,7 @@
                 <a:ea typeface="Outfit" pitchFamily="34" charset="-122"/>
                 <a:cs typeface="Outfit" pitchFamily="34" charset="-120"/>
               </a:rPr>
-              <a:t>Module 5: Build review, correction, and handoff</a:t>
+              <a:t>Module 5. Build review, correction, and handoff</a:t>
             </a:r>
             <a:endParaRPr lang="en-US" sz="2900" dirty="0"/>
           </a:p>
@@ -5338,7 +5338,7 @@
                 <a:ea typeface="Inter" pitchFamily="34" charset="-122"/>
                 <a:cs typeface="Inter" pitchFamily="34" charset="-120"/>
               </a:rPr>
-              <a:t>Human review belongs in the product design. It cannot be a fallback after automation fails.</a:t>
+              <a:t>Build the review path before allowing extraction results to reach a business system.</a:t>
             </a:r>
             <a:endParaRPr lang="en-US" sz="1700" dirty="0"/>
           </a:p>
@@ -5498,7 +5498,7 @@
                 <a:ea typeface="Inter" pitchFamily="34" charset="-122"/>
                 <a:cs typeface="Inter" pitchFamily="34" charset="-120"/>
               </a:rPr>
-              <a:t>The review experience should make the right action easier than bypassing the process.</a:t>
+              <a:t>Show the source evidence and flagged fields together in the review interface.</a:t>
             </a:r>
             <a:endParaRPr lang="en-US" sz="1700" dirty="0"/>
           </a:p>
@@ -5565,7 +5565,7 @@
       </p:sp>
       <p:pic>
         <p:nvPicPr>
-          <p:cNvPr id="3" name="Image 0" descr="/home/marco/fy27-hackathons/frontier-ai-starter-kit-rvas/docs/assets/img/logo-mark-slide.png">    </p:cNvPr>
+          <p:cNvPr id="3" name="Image 0" descr="/Users/marco/Desktop/repo/frontier-agentic-cobuild-rvas/docs/assets/img/logo-mark-slide.png">    </p:cNvPr>
           <p:cNvPicPr>
             <a:picLocks noChangeAspect="1"/>
           </p:cNvPicPr>
@@ -5833,7 +5833,7 @@
                 <a:ea typeface="Inter" pitchFamily="34" charset="-122"/>
                 <a:cs typeface="Inter" pitchFamily="34" charset="-120"/>
               </a:rPr>
-              <a:t>Handoff seam: Use a governed downstream contract. Do not write directly from unreviewed extraction.</a:t>
+              <a:t>Handoff contract: Use a governed downstream contract. Do not write directly from unreviewed extraction.</a:t>
             </a:r>
             <a:endParaRPr lang="en-US" sz="1700" dirty="0"/>
           </a:p>
@@ -5868,7 +5868,7 @@
                 <a:ea typeface="Inter" pitchFamily="34" charset="-122"/>
                 <a:cs typeface="Inter" pitchFamily="34" charset="-120"/>
               </a:rPr>
-              <a:t>Reducing reviewer effort must not erase accountability.</a:t>
+              <a:t>Keep correction history when simplifying review.</a:t>
             </a:r>
             <a:endParaRPr lang="en-US" sz="1700" dirty="0"/>
           </a:p>
@@ -5935,7 +5935,7 @@
       </p:sp>
       <p:pic>
         <p:nvPicPr>
-          <p:cNvPr id="3" name="Image 0" descr="/home/marco/fy27-hackathons/frontier-ai-starter-kit-rvas/docs/assets/img/logo-mark-slide.png">    </p:cNvPr>
+          <p:cNvPr id="3" name="Image 0" descr="/Users/marco/Desktop/repo/frontier-agentic-cobuild-rvas/docs/assets/img/logo-mark-slide.png">    </p:cNvPr>
           <p:cNvPicPr>
             <a:picLocks noChangeAspect="1"/>
           </p:cNvPicPr>
@@ -6323,7 +6323,7 @@
       </p:sp>
       <p:pic>
         <p:nvPicPr>
-          <p:cNvPr id="3" name="Image 0" descr="/home/marco/fy27-hackathons/frontier-ai-starter-kit-rvas/docs/assets/img/logo-mark-slide.png">    </p:cNvPr>
+          <p:cNvPr id="3" name="Image 0" descr="/Users/marco/Desktop/repo/frontier-agentic-cobuild-rvas/docs/assets/img/logo-mark-slide.png">    </p:cNvPr>
           <p:cNvPicPr>
             <a:picLocks noChangeAspect="1"/>
           </p:cNvPicPr>
@@ -6460,7 +6460,7 @@
                 <a:ea typeface="Outfit" pitchFamily="34" charset="-122"/>
                 <a:cs typeface="Outfit" pitchFamily="34" charset="-120"/>
               </a:rPr>
-              <a:t>Module 6: Evaluate and trace the workflow</a:t>
+              <a:t>Module 6. Evaluate and trace the workflow</a:t>
             </a:r>
             <a:endParaRPr lang="en-US" sz="2900" dirty="0"/>
           </a:p>
@@ -6501,7 +6501,7 @@
                 <a:ea typeface="Inter" pitchFamily="34" charset="-122"/>
                 <a:cs typeface="Inter" pitchFamily="34" charset="-120"/>
               </a:rPr>
-              <a:t>A document workflow is ready when it performs consistently on representative cases and failures are diagnosable.</a:t>
+              <a:t>Measure the workflow on representative cases and confirm operators can diagnose failures.</a:t>
             </a:r>
             <a:endParaRPr lang="en-US" sz="1700" dirty="0"/>
           </a:p>
@@ -6661,7 +6661,7 @@
                 <a:ea typeface="Inter" pitchFamily="34" charset="-122"/>
                 <a:cs typeface="Inter" pitchFamily="34" charset="-120"/>
               </a:rPr>
-              <a:t>Evaluate real workflow risk, not only model output quality.</a:t>
+              <a:t>Evaluate review routing and downstream approval alongside model output quality.</a:t>
             </a:r>
             <a:endParaRPr lang="en-US" sz="1700" dirty="0"/>
           </a:p>
@@ -6728,7 +6728,7 @@
       </p:sp>
       <p:pic>
         <p:nvPicPr>
-          <p:cNvPr id="3" name="Image 0" descr="/home/marco/fy27-hackathons/frontier-ai-starter-kit-rvas/docs/assets/img/logo-mark-slide.png">    </p:cNvPr>
+          <p:cNvPr id="3" name="Image 0" descr="/Users/marco/Desktop/repo/frontier-agentic-cobuild-rvas/docs/assets/img/logo-mark-slide.png">    </p:cNvPr>
           <p:cNvPicPr>
             <a:picLocks noChangeAspect="1"/>
           </p:cNvPicPr>
@@ -7031,7 +7031,7 @@
                 <a:ea typeface="Inter" pitchFamily="34" charset="-122"/>
                 <a:cs typeface="Inter" pitchFamily="34" charset="-120"/>
               </a:rPr>
-              <a:t>More automation without measurement increases hidden business risk.</a:t>
+              <a:t>Check each change against the agreed quality gates before expanding automation.</a:t>
             </a:r>
             <a:endParaRPr lang="en-US" sz="1700" dirty="0"/>
           </a:p>
@@ -7071,7 +7071,7 @@
       </p:grpSpPr>
       <p:pic>
         <p:nvPicPr>
-          <p:cNvPr id="2" name="Image 0" descr="/home/marco/fy27-hackathons/frontier-ai-starter-kit-rvas/docs/assets/img/logo-mark-white-slide.png">    </p:cNvPr>
+          <p:cNvPr id="2" name="Image 0" descr="/Users/marco/Desktop/repo/frontier-agentic-cobuild-rvas/docs/assets/img/logo-mark-white-slide.png">    </p:cNvPr>
           <p:cNvPicPr>
             <a:picLocks noChangeAspect="1"/>
           </p:cNvPicPr>
@@ -7249,7 +7249,7 @@
                 <a:ea typeface="Inter" pitchFamily="34" charset="-122"/>
                 <a:cs typeface="Inter" pitchFamily="34" charset="-120"/>
               </a:rPr>
-              <a:t>Use this working-module deck with sponsors, SMEs, security, data owners, and engineering. It is not an implementation walkthrough.</a:t>
+              <a:t>Use this deck with sponsors, SMEs, security, data owners, and engineering to make decisions. The scenario modules contain the implementation steps.</a:t>
             </a:r>
             <a:endParaRPr lang="en-US" sz="1700" dirty="0"/>
           </a:p>
@@ -7458,7 +7458,7 @@
       </p:sp>
       <p:pic>
         <p:nvPicPr>
-          <p:cNvPr id="3" name="Image 0" descr="/home/marco/fy27-hackathons/frontier-ai-starter-kit-rvas/docs/assets/img/logo-mark-slide.png">    </p:cNvPr>
+          <p:cNvPr id="3" name="Image 0" descr="/Users/marco/Desktop/repo/frontier-agentic-cobuild-rvas/docs/assets/img/logo-mark-slide.png">    </p:cNvPr>
           <p:cNvPicPr>
             <a:picLocks noChangeAspect="1"/>
           </p:cNvPicPr>
@@ -7846,7 +7846,7 @@
       </p:sp>
       <p:pic>
         <p:nvPicPr>
-          <p:cNvPr id="3" name="Image 0" descr="/home/marco/fy27-hackathons/frontier-ai-starter-kit-rvas/docs/assets/img/logo-mark-slide.png">    </p:cNvPr>
+          <p:cNvPr id="3" name="Image 0" descr="/Users/marco/Desktop/repo/frontier-agentic-cobuild-rvas/docs/assets/img/logo-mark-slide.png">    </p:cNvPr>
           <p:cNvPicPr>
             <a:picLocks noChangeAspect="1"/>
           </p:cNvPicPr>
@@ -7983,7 +7983,7 @@
                 <a:ea typeface="Outfit" pitchFamily="34" charset="-122"/>
                 <a:cs typeface="Outfit" pitchFamily="34" charset="-120"/>
               </a:rPr>
-              <a:t>Module 7: Deploy the reviewable workflow</a:t>
+              <a:t>Module 7. Deploy the reviewable workflow</a:t>
             </a:r>
             <a:endParaRPr lang="en-US" sz="2900" dirty="0"/>
           </a:p>
@@ -8024,7 +8024,7 @@
                 <a:ea typeface="Inter" pitchFamily="34" charset="-122"/>
                 <a:cs typeface="Inter" pitchFamily="34" charset="-120"/>
               </a:rPr>
-              <a:t>Deployment turns an experiment into an accountable business service.</a:t>
+              <a:t>Assign the deployed workflow's access, support, and rollback owners.</a:t>
             </a:r>
             <a:endParaRPr lang="en-US" sz="1700" dirty="0"/>
           </a:p>
@@ -8184,7 +8184,7 @@
                 <a:ea typeface="Inter" pitchFamily="34" charset="-122"/>
                 <a:cs typeface="Inter" pitchFamily="34" charset="-120"/>
               </a:rPr>
-              <a:t>Keep the first deployment controlled, observable, and reversible.</a:t>
+              <a:t>Limit pilot access, check traces, and rehearse rollback.</a:t>
             </a:r>
             <a:endParaRPr lang="en-US" sz="1700" dirty="0"/>
           </a:p>
@@ -8251,7 +8251,7 @@
       </p:sp>
       <p:pic>
         <p:nvPicPr>
-          <p:cNvPr id="3" name="Image 0" descr="/home/marco/fy27-hackathons/frontier-ai-starter-kit-rvas/docs/assets/img/logo-mark-slide.png">    </p:cNvPr>
+          <p:cNvPr id="3" name="Image 0" descr="/Users/marco/Desktop/repo/frontier-agentic-cobuild-rvas/docs/assets/img/logo-mark-slide.png">    </p:cNvPr>
           <p:cNvPicPr>
             <a:picLocks noChangeAspect="1"/>
           </p:cNvPicPr>
@@ -8554,7 +8554,7 @@
                 <a:ea typeface="Inter" pitchFamily="34" charset="-122"/>
                 <a:cs typeface="Inter" pitchFamily="34" charset="-120"/>
               </a:rPr>
-              <a:t>A broad rollout before operational readiness can create more manual work than it removes.</a:t>
+              <a:t>Resolve support and rollback gaps before broad rollout.</a:t>
             </a:r>
             <a:endParaRPr lang="en-US" sz="1700" dirty="0"/>
           </a:p>
@@ -8621,7 +8621,7 @@
       </p:sp>
       <p:pic>
         <p:nvPicPr>
-          <p:cNvPr id="3" name="Image 0" descr="/home/marco/fy27-hackathons/frontier-ai-starter-kit-rvas/docs/assets/img/logo-mark-slide.png">    </p:cNvPr>
+          <p:cNvPr id="3" name="Image 0" descr="/Users/marco/Desktop/repo/frontier-agentic-cobuild-rvas/docs/assets/img/logo-mark-slide.png">    </p:cNvPr>
           <p:cNvPicPr>
             <a:picLocks noChangeAspect="1"/>
           </p:cNvPicPr>
@@ -8982,7 +8982,7 @@
       </p:grpSpPr>
       <p:pic>
         <p:nvPicPr>
-          <p:cNvPr id="2" name="Image 0" descr="/home/marco/fy27-hackathons/frontier-ai-starter-kit-rvas/docs/assets/img/logo-mark-white-slide.png">    </p:cNvPr>
+          <p:cNvPr id="2" name="Image 0" descr="/Users/marco/Desktop/repo/frontier-agentic-cobuild-rvas/docs/assets/img/logo-mark-white-slide.png">    </p:cNvPr>
           <p:cNvPicPr>
             <a:picLocks noChangeAspect="1"/>
           </p:cNvPicPr>
@@ -9321,7 +9321,7 @@
                 <a:ea typeface="Inter" pitchFamily="34" charset="-122"/>
                 <a:cs typeface="Inter" pitchFamily="34" charset="-120"/>
               </a:rPr>
-              <a:t>Agree on the first pilot slice and the evidence needed before expansion.</a:t>
+              <a:t>Agree on the first pilot scope and the evidence needed before expansion.</a:t>
             </a:r>
             <a:endParaRPr lang="en-US" sz="1700" dirty="0"/>
           </a:p>
@@ -9388,7 +9388,7 @@
       </p:sp>
       <p:pic>
         <p:nvPicPr>
-          <p:cNvPr id="3" name="Image 0" descr="/home/marco/fy27-hackathons/frontier-ai-starter-kit-rvas/docs/assets/img/logo-mark-slide.png">    </p:cNvPr>
+          <p:cNvPr id="3" name="Image 0" descr="/Users/marco/Desktop/repo/frontier-agentic-cobuild-rvas/docs/assets/img/logo-mark-slide.png">    </p:cNvPr>
           <p:cNvPicPr>
             <a:picLocks noChangeAspect="1"/>
           </p:cNvPicPr>
@@ -9525,7 +9525,7 @@
                 <a:ea typeface="Outfit" pitchFamily="34" charset="-122"/>
                 <a:cs typeface="Outfit" pitchFamily="34" charset="-120"/>
               </a:rPr>
-              <a:t>Module 1: Confirm scope and connect the foundation</a:t>
+              <a:t>Module 1. Confirm scope and connect the foundation</a:t>
             </a:r>
             <a:endParaRPr lang="en-US" sz="2900" dirty="0"/>
           </a:p>
@@ -9692,41 +9692,6 @@
                 <a:cs typeface="Inter" pitchFamily="34" charset="-120"/>
               </a:rPr>
               <a:t>How to apply keyless access, least privilege, and traceability from the start.</a:t>
-            </a:r>
-            <a:endParaRPr lang="en-US" sz="1700" dirty="0"/>
-          </a:p>
-          <a:p>
-            <a:pPr indent="0" marL="0">
-              <a:buNone/>
-            </a:pPr>
-            <a:r>
-              <a:rPr lang="en-US" sz="1700" dirty="0">
-                <a:solidFill>
-                  <a:srgbClr val="111827"/>
-                </a:solidFill>
-                <a:latin typeface="Inter" pitchFamily="34" charset="0"/>
-                <a:ea typeface="Inter" pitchFamily="34" charset="-122"/>
-                <a:cs typeface="Inter" pitchFamily="34" charset="-120"/>
-              </a:rPr>
-              <a:t>
-</a:t>
-            </a:r>
-            <a:endParaRPr lang="en-US" sz="1700" dirty="0"/>
-          </a:p>
-          <a:p>
-            <a:pPr indent="0" marL="0">
-              <a:buNone/>
-            </a:pPr>
-            <a:r>
-              <a:rPr lang="en-US" sz="1700" dirty="0">
-                <a:solidFill>
-                  <a:srgbClr val="111827"/>
-                </a:solidFill>
-                <a:latin typeface="Inter" pitchFamily="34" charset="0"/>
-                <a:ea typeface="Inter" pitchFamily="34" charset="-122"/>
-                <a:cs typeface="Inter" pitchFamily="34" charset="-120"/>
-              </a:rPr>
-              <a:t>Build a reusable base that later scenario tracks can share. Avoid a one-off demo environment.</a:t>
             </a:r>
             <a:endParaRPr lang="en-US" sz="1700" dirty="0"/>
           </a:p>
@@ -9793,7 +9758,7 @@
       </p:sp>
       <p:pic>
         <p:nvPicPr>
-          <p:cNvPr id="3" name="Image 0" descr="/home/marco/fy27-hackathons/frontier-ai-starter-kit-rvas/docs/assets/img/logo-mark-slide.png">    </p:cNvPr>
+          <p:cNvPr id="3" name="Image 0" descr="/Users/marco/Desktop/repo/frontier-agentic-cobuild-rvas/docs/assets/img/logo-mark-slide.png">    </p:cNvPr>
           <p:cNvPicPr>
             <a:picLocks noChangeAspect="1"/>
           </p:cNvPicPr>
@@ -10096,7 +10061,7 @@
                 <a:ea typeface="Inter" pitchFamily="34" charset="-122"/>
                 <a:cs typeface="Inter" pitchFamily="34" charset="-120"/>
               </a:rPr>
-              <a:t>The trade-off is simple: quick setup must not hide production controls needed later.</a:t>
+              <a:t>Record any deferred production controls and their owners.</a:t>
             </a:r>
             <a:endParaRPr lang="en-US" sz="1700" dirty="0"/>
           </a:p>
@@ -10163,7 +10128,7 @@
       </p:sp>
       <p:pic>
         <p:nvPicPr>
-          <p:cNvPr id="3" name="Image 0" descr="/home/marco/fy27-hackathons/frontier-ai-starter-kit-rvas/docs/assets/img/logo-mark-slide.png">    </p:cNvPr>
+          <p:cNvPr id="3" name="Image 0" descr="/Users/marco/Desktop/repo/frontier-agentic-cobuild-rvas/docs/assets/img/logo-mark-slide.png">    </p:cNvPr>
           <p:cNvPicPr>
             <a:picLocks noChangeAspect="1"/>
           </p:cNvPicPr>
@@ -10413,7 +10378,7 @@
                 <a:ea typeface="Inter" pitchFamily="34" charset="-122"/>
                 <a:cs typeface="Inter" pitchFamily="34" charset="-120"/>
               </a:rPr>
-              <a:t>Environment boundaries are understood.</a:t>
+              <a:t>The team has documented the environment boundaries.</a:t>
             </a:r>
             <a:endParaRPr lang="en-US" sz="1700" dirty="0"/>
           </a:p>
@@ -10551,7 +10516,7 @@
       </p:sp>
       <p:pic>
         <p:nvPicPr>
-          <p:cNvPr id="3" name="Image 0" descr="/home/marco/fy27-hackathons/frontier-ai-starter-kit-rvas/docs/assets/img/logo-mark-slide.png">    </p:cNvPr>
+          <p:cNvPr id="3" name="Image 0" descr="/Users/marco/Desktop/repo/frontier-agentic-cobuild-rvas/docs/assets/img/logo-mark-slide.png">    </p:cNvPr>
           <p:cNvPicPr>
             <a:picLocks noChangeAspect="1"/>
           </p:cNvPicPr>
@@ -10688,7 +10653,7 @@
                 <a:ea typeface="Outfit" pitchFamily="34" charset="-122"/>
                 <a:cs typeface="Outfit" pitchFamily="34" charset="-120"/>
               </a:rPr>
-              <a:t>Module 2: Connect an approved document source</a:t>
+              <a:t>Module 2. Connect an approved document source</a:t>
             </a:r>
             <a:endParaRPr lang="en-US" sz="2900" dirty="0"/>
           </a:p>
@@ -10729,7 +10694,7 @@
                 <a:ea typeface="Inter" pitchFamily="34" charset="-122"/>
                 <a:cs typeface="Inter" pitchFamily="34" charset="-120"/>
               </a:rPr>
-              <a:t>Content Understanding starts with approved documents, not files that merely happen to be available.</a:t>
+              <a:t>Process only documents whose owners have approved their use.</a:t>
             </a:r>
             <a:endParaRPr lang="en-US" sz="1700" dirty="0"/>
           </a:p>
@@ -10889,7 +10854,7 @@
                 <a:ea typeface="Inter" pitchFamily="34" charset="-122"/>
                 <a:cs typeface="Inter" pitchFamily="34" charset="-120"/>
               </a:rPr>
-              <a:t>A clean folder of copied files works for a lab. It is not an approved business source.</a:t>
+              <a:t>For customer documents, a staging folder needs source approval and access controls.</a:t>
             </a:r>
             <a:endParaRPr lang="en-US" sz="1700" dirty="0"/>
           </a:p>
@@ -10956,7 +10921,7 @@
       </p:sp>
       <p:pic>
         <p:nvPicPr>
-          <p:cNvPr id="3" name="Image 0" descr="/home/marco/fy27-hackathons/frontier-ai-starter-kit-rvas/docs/assets/img/logo-mark-slide.png">    </p:cNvPr>
+          <p:cNvPr id="3" name="Image 0" descr="/Users/marco/Desktop/repo/frontier-agentic-cobuild-rvas/docs/assets/img/logo-mark-slide.png">    </p:cNvPr>
           <p:cNvPicPr>
             <a:picLocks noChangeAspect="1"/>
           </p:cNvPicPr>
@@ -11259,7 +11224,7 @@
                 <a:ea typeface="Inter" pitchFamily="34" charset="-122"/>
                 <a:cs typeface="Inter" pitchFamily="34" charset="-120"/>
               </a:rPr>
-              <a:t>Faster intake does not justify losing provenance or authorization.</a:t>
+              <a:t>Check source provenance and authorization before intake.</a:t>
             </a:r>
             <a:endParaRPr lang="en-US" sz="1700" dirty="0"/>
           </a:p>
@@ -11326,7 +11291,7 @@
       </p:sp>
       <p:pic>
         <p:nvPicPr>
-          <p:cNvPr id="3" name="Image 0" descr="/home/marco/fy27-hackathons/frontier-ai-starter-kit-rvas/docs/assets/img/logo-mark-slide.png">    </p:cNvPr>
+          <p:cNvPr id="3" name="Image 0" descr="/Users/marco/Desktop/repo/frontier-agentic-cobuild-rvas/docs/assets/img/logo-mark-slide.png">    </p:cNvPr>
           <p:cNvPicPr>
             <a:picLocks noChangeAspect="1"/>
           </p:cNvPicPr>
@@ -11612,7 +11577,7 @@
                 <a:ea typeface="Inter" pitchFamily="34" charset="-122"/>
                 <a:cs typeface="Inter" pitchFamily="34" charset="-120"/>
               </a:rPr>
-              <a:t>Access boundaries are enforceable, not just assumed.</a:t>
+              <a:t>Access checks allow intended users and deny unauthorized users.</a:t>
             </a:r>
             <a:endParaRPr lang="en-US" sz="1700" dirty="0"/>
           </a:p>
@@ -11714,7 +11679,7 @@
       </p:sp>
       <p:pic>
         <p:nvPicPr>
-          <p:cNvPr id="3" name="Image 0" descr="/home/marco/fy27-hackathons/frontier-ai-starter-kit-rvas/docs/assets/img/logo-mark-slide.png">    </p:cNvPr>
+          <p:cNvPr id="3" name="Image 0" descr="/Users/marco/Desktop/repo/frontier-agentic-cobuild-rvas/docs/assets/img/logo-mark-slide.png">    </p:cNvPr>
           <p:cNvPicPr>
             <a:picLocks noChangeAspect="1"/>
           </p:cNvPicPr>
@@ -11851,7 +11816,7 @@
                 <a:ea typeface="Outfit" pitchFamily="34" charset="-122"/>
                 <a:cs typeface="Outfit" pitchFamily="34" charset="-120"/>
               </a:rPr>
-              <a:t>Module 3: Select the extraction capability</a:t>
+              <a:t>Module 3. Select the extraction capability</a:t>
             </a:r>
             <a:endParaRPr lang="en-US" sz="2900" dirty="0"/>
           </a:p>
@@ -12052,7 +12017,7 @@
                 <a:ea typeface="Inter" pitchFamily="34" charset="-122"/>
                 <a:cs typeface="Inter" pitchFamily="34" charset="-120"/>
               </a:rPr>
-              <a:t>The customer should leave with a documented capability decision, not a default product choice.</a:t>
+              <a:t>Record the chosen capability and the document evidence behind it.</a:t>
             </a:r>
             <a:endParaRPr lang="en-US" sz="1700" dirty="0"/>
           </a:p>
